--- a/sqlserver-sql/presentation/sqlserver-dml.pptx
+++ b/sqlserver-sql/presentation/sqlserver-dml.pptx
@@ -4383,13 +4383,13 @@
                 </a:solidFill>
                 <a:latin typeface="Courier"/>
               </a:rPr>
-              <a:t>INSERT</a:t>
-            </a:r>
-            <a:r>
-              <a:rPr sz="1400" dirty="0">
-                <a:latin typeface="Courier"/>
-              </a:rPr>
-              <a:t> </a:t>
+              <a:t>INSERT INTO employees.dept VALUES (2000, 'FOUNDRY', NULL);</a:t>
+            </a:r>
+            <a:r>
+              <a:rPr sz="1400" dirty="0">
+                <a:latin typeface="Courier"/>
+              </a:rPr>
+              <a:t/>
             </a:r>
             <a:r>
               <a:rPr sz="1400" b="1" dirty="0">
@@ -4398,25 +4398,25 @@
                 </a:solidFill>
                 <a:latin typeface="Courier"/>
               </a:rPr>
-              <a:t>INTO</a:t>
-            </a:r>
-            <a:r>
-              <a:rPr sz="1400" dirty="0">
-                <a:latin typeface="Courier"/>
-              </a:rPr>
-              <a:t> </a:t>
+              <a:t/>
+            </a:r>
+            <a:r>
+              <a:rPr sz="1400" dirty="0">
+                <a:latin typeface="Courier"/>
+              </a:rPr>
+              <a:t/>
             </a:r>
             <a:r>
               <a:rPr sz="1400" dirty="0" err="1">
                 <a:latin typeface="Courier"/>
               </a:rPr>
-              <a:t>employees.dept</a:t>
-            </a:r>
-            <a:r>
-              <a:rPr sz="1400" dirty="0">
-                <a:latin typeface="Courier"/>
-              </a:rPr>
-              <a:t> </a:t>
+              <a:t/>
+            </a:r>
+            <a:r>
+              <a:rPr sz="1400" dirty="0">
+                <a:latin typeface="Courier"/>
+              </a:rPr>
+              <a:t/>
             </a:r>
             <a:r>
               <a:rPr sz="1400" b="1" dirty="0">
@@ -4425,13 +4425,13 @@
                 </a:solidFill>
                 <a:latin typeface="Courier"/>
               </a:rPr>
-              <a:t>VALUES</a:t>
-            </a:r>
-            <a:r>
-              <a:rPr sz="1400" dirty="0">
-                <a:latin typeface="Courier"/>
-              </a:rPr>
-              <a:t> (</a:t>
+              <a:t/>
+            </a:r>
+            <a:r>
+              <a:rPr sz="1400" dirty="0">
+                <a:latin typeface="Courier"/>
+              </a:rPr>
+              <a:t/>
             </a:r>
             <a:r>
               <a:rPr sz="1400" dirty="0">
@@ -4440,13 +4440,13 @@
                 </a:solidFill>
                 <a:latin typeface="Courier"/>
               </a:rPr>
-              <a:t>2000</a:t>
-            </a:r>
-            <a:r>
-              <a:rPr sz="1400" dirty="0">
-                <a:latin typeface="Courier"/>
-              </a:rPr>
-              <a:t>, </a:t>
+              <a:t/>
+            </a:r>
+            <a:r>
+              <a:rPr sz="1400" dirty="0">
+                <a:latin typeface="Courier"/>
+              </a:rPr>
+              <a:t/>
             </a:r>
             <a:r>
               <a:rPr sz="1400" dirty="0">
@@ -4455,13 +4455,13 @@
                 </a:solidFill>
                 <a:latin typeface="Courier"/>
               </a:rPr>
-              <a:t>'FOUNDRY'</a:t>
-            </a:r>
-            <a:r>
-              <a:rPr sz="1400" dirty="0">
-                <a:latin typeface="Courier"/>
-              </a:rPr>
-              <a:t>);</a:t>
+              <a:t/>
+            </a:r>
+            <a:r>
+              <a:rPr sz="1400" dirty="0">
+                <a:latin typeface="Courier"/>
+              </a:rPr>
+              <a:t/>
             </a:r>
             <a:br>
               <a:rPr sz="1400" dirty="0"/>
